--- a/第5章-矢量数据处理及分析/选做作业四.pptx
+++ b/第5章-矢量数据处理及分析/选做作业四.pptx
@@ -14,7 +14,7 @@
   <p:sldIdLst>
     <p:sldId id="2742" r:id="rId3"/>
   </p:sldIdLst>
-  <p:sldSz cx="9144000" cy="6858000" type="screen4x3"/>
+  <p:sldSz cx="12192000" cy="6858000"/>
   <p:notesSz cx="7099300" cy="10234613"/>
   <p:custDataLst>
     <p:tags r:id="rId6"/>
@@ -147,257 +147,257 @@
   <p:extLst>
     <p:ext uri="{EFAFB233-063F-42B5-8137-9DF3F51BA10A}">
       <p15:sldGuideLst xmlns:p15="http://schemas.microsoft.com/office/powerpoint/2012/main">
-        <p15:guide id="1" orient="horz" pos="663">
+        <p15:guide id="1" orient="horz" pos="663" userDrawn="1">
           <p15:clr>
             <a:srgbClr val="A4A3A4"/>
           </p15:clr>
         </p15:guide>
-        <p15:guide id="2" orient="horz" pos="1412">
+        <p15:guide id="2" orient="horz" pos="1412" userDrawn="1">
           <p15:clr>
             <a:srgbClr val="A4A3A4"/>
           </p15:clr>
         </p15:guide>
-        <p15:guide id="3" pos="181">
+        <p15:guide id="3" pos="241" userDrawn="1">
           <p15:clr>
             <a:srgbClr val="A4A3A4"/>
           </p15:clr>
         </p15:guide>
-        <p15:guide id="4" pos="5556">
+        <p15:guide id="4" pos="7408" userDrawn="1">
           <p15:clr>
             <a:srgbClr val="A4A3A4"/>
           </p15:clr>
         </p15:guide>
-        <p15:guide id="5" pos="2903">
+        <p15:guide id="5" pos="3871" userDrawn="1">
           <p15:clr>
             <a:srgbClr val="A4A3A4"/>
           </p15:clr>
         </p15:guide>
-        <p15:guide id="6" orient="horz" pos="700">
+        <p15:guide id="6" orient="horz" pos="700" userDrawn="1">
           <p15:clr>
             <a:srgbClr val="A4A3A4"/>
           </p15:clr>
         </p15:guide>
-        <p15:guide id="7" orient="horz" pos="4119">
+        <p15:guide id="7" orient="horz" pos="4119" userDrawn="1">
           <p15:clr>
             <a:srgbClr val="A4A3A4"/>
           </p15:clr>
         </p15:guide>
-        <p15:guide id="8" pos="311">
+        <p15:guide id="8" pos="415" userDrawn="1">
           <p15:clr>
             <a:srgbClr val="A4A3A4"/>
           </p15:clr>
         </p15:guide>
-        <p15:guide id="9" pos="5501">
+        <p15:guide id="9" pos="7335" userDrawn="1">
           <p15:clr>
             <a:srgbClr val="A4A3A4"/>
           </p15:clr>
         </p15:guide>
-        <p15:guide id="10" orient="horz" pos="462">
+        <p15:guide id="10" orient="horz" pos="462" userDrawn="1">
           <p15:clr>
             <a:srgbClr val="A4A3A4"/>
           </p15:clr>
         </p15:guide>
-        <p15:guide id="11" pos="77">
+        <p15:guide id="11" pos="103" userDrawn="1">
           <p15:clr>
             <a:srgbClr val="A4A3A4"/>
           </p15:clr>
         </p15:guide>
-        <p15:guide id="12" pos="72">
+        <p15:guide id="12" pos="96" userDrawn="1">
           <p15:clr>
             <a:srgbClr val="A4A3A4"/>
           </p15:clr>
         </p15:guide>
-        <p15:guide id="13" orient="horz" pos="2">
+        <p15:guide id="13" orient="horz" pos="2" userDrawn="1">
           <p15:clr>
             <a:srgbClr val="A4A3A4"/>
           </p15:clr>
         </p15:guide>
-        <p15:guide id="14" pos="807">
+        <p15:guide id="14" pos="1076" userDrawn="1">
           <p15:clr>
             <a:srgbClr val="A4A3A4"/>
           </p15:clr>
         </p15:guide>
-        <p15:guide id="15" pos="1463">
+        <p15:guide id="15" pos="1951" userDrawn="1">
           <p15:clr>
             <a:srgbClr val="A4A3A4"/>
           </p15:clr>
         </p15:guide>
-        <p15:guide id="16" pos="2079">
+        <p15:guide id="16" pos="2772" userDrawn="1">
           <p15:clr>
             <a:srgbClr val="A4A3A4"/>
           </p15:clr>
         </p15:guide>
-        <p15:guide id="17" pos="2714">
+        <p15:guide id="17" pos="3619" userDrawn="1">
           <p15:clr>
             <a:srgbClr val="A4A3A4"/>
           </p15:clr>
         </p15:guide>
-        <p15:guide id="18" pos="3370">
+        <p15:guide id="18" pos="4493" userDrawn="1">
           <p15:clr>
             <a:srgbClr val="A4A3A4"/>
           </p15:clr>
         </p15:guide>
-        <p15:guide id="19" pos="3985">
+        <p15:guide id="19" pos="5313" userDrawn="1">
           <p15:clr>
             <a:srgbClr val="A4A3A4"/>
           </p15:clr>
         </p15:guide>
-        <p15:guide id="20" pos="4631">
+        <p15:guide id="20" pos="6175" userDrawn="1">
           <p15:clr>
             <a:srgbClr val="A4A3A4"/>
           </p15:clr>
         </p15:guide>
-        <p15:guide id="21" orient="horz" pos="581">
+        <p15:guide id="21" orient="horz" pos="581" userDrawn="1">
           <p15:clr>
             <a:srgbClr val="A4A3A4"/>
           </p15:clr>
         </p15:guide>
-        <p15:guide id="22" orient="horz" pos="3230">
+        <p15:guide id="22" orient="horz" pos="3230" userDrawn="1">
           <p15:clr>
             <a:srgbClr val="A4A3A4"/>
           </p15:clr>
         </p15:guide>
-        <p15:guide id="23" orient="horz" pos="1230">
+        <p15:guide id="23" orient="horz" pos="1230" userDrawn="1">
           <p15:clr>
             <a:srgbClr val="A4A3A4"/>
           </p15:clr>
         </p15:guide>
-        <p15:guide id="24" orient="horz">
+        <p15:guide id="24" orient="horz" userDrawn="1">
           <p15:clr>
             <a:srgbClr val="A4A3A4"/>
           </p15:clr>
         </p15:guide>
-        <p15:guide id="25" orient="horz" pos="1450">
+        <p15:guide id="25" orient="horz" pos="1450" userDrawn="1">
           <p15:clr>
             <a:srgbClr val="A4A3A4"/>
           </p15:clr>
         </p15:guide>
-        <p15:guide id="26" pos="281">
+        <p15:guide id="26" pos="375" userDrawn="1">
           <p15:clr>
             <a:srgbClr val="A4A3A4"/>
           </p15:clr>
         </p15:guide>
-        <p15:guide id="27" orient="horz" pos="3095">
+        <p15:guide id="27" orient="horz" pos="3095" userDrawn="1">
           <p15:clr>
             <a:srgbClr val="A4A3A4"/>
           </p15:clr>
         </p15:guide>
-        <p15:guide id="28" orient="horz" pos="2372">
+        <p15:guide id="28" orient="horz" pos="2372" userDrawn="1">
           <p15:clr>
             <a:srgbClr val="A4A3A4"/>
           </p15:clr>
         </p15:guide>
-        <p15:guide id="29" orient="horz" pos="4159">
+        <p15:guide id="29" orient="horz" pos="4159" userDrawn="1">
           <p15:clr>
             <a:srgbClr val="A4A3A4"/>
           </p15:clr>
         </p15:guide>
-        <p15:guide id="30" pos="313">
+        <p15:guide id="30" pos="417" userDrawn="1">
           <p15:clr>
             <a:srgbClr val="A4A3A4"/>
           </p15:clr>
         </p15:guide>
-        <p15:guide id="31" pos="1655">
+        <p15:guide id="31" pos="2207" userDrawn="1">
           <p15:clr>
             <a:srgbClr val="A4A3A4"/>
           </p15:clr>
         </p15:guide>
-        <p15:guide id="32" pos="5727">
+        <p15:guide id="32" pos="7636" userDrawn="1">
           <p15:clr>
             <a:srgbClr val="A4A3A4"/>
           </p15:clr>
         </p15:guide>
-        <p15:guide id="33" orient="horz" pos="632">
+        <p15:guide id="33" orient="horz" pos="632" userDrawn="1">
           <p15:clr>
             <a:srgbClr val="A4A3A4"/>
           </p15:clr>
         </p15:guide>
-        <p15:guide id="34" orient="horz" pos="1461">
+        <p15:guide id="34" orient="horz" pos="1461" userDrawn="1">
           <p15:clr>
             <a:srgbClr val="A4A3A4"/>
           </p15:clr>
         </p15:guide>
-        <p15:guide id="35" orient="horz" pos="2262">
+        <p15:guide id="35" orient="horz" pos="2262" userDrawn="1">
           <p15:clr>
             <a:srgbClr val="A4A3A4"/>
           </p15:clr>
         </p15:guide>
-        <p15:guide id="36" orient="horz" pos="3072">
+        <p15:guide id="36" orient="horz" pos="3072" userDrawn="1">
           <p15:clr>
             <a:srgbClr val="A4A3A4"/>
           </p15:clr>
         </p15:guide>
-        <p15:guide id="37" pos="765">
+        <p15:guide id="37" pos="1020" userDrawn="1">
           <p15:clr>
             <a:srgbClr val="A4A3A4"/>
           </p15:clr>
         </p15:guide>
-        <p15:guide id="38" pos="5580">
+        <p15:guide id="38" pos="7440" userDrawn="1">
           <p15:clr>
             <a:srgbClr val="A4A3A4"/>
           </p15:clr>
         </p15:guide>
-        <p15:guide id="39" pos="5039">
+        <p15:guide id="39" pos="6719" userDrawn="1">
           <p15:clr>
             <a:srgbClr val="A4A3A4"/>
           </p15:clr>
         </p15:guide>
-        <p15:guide id="40" orient="horz" pos="621">
+        <p15:guide id="40" orient="horz" pos="621" userDrawn="1">
           <p15:clr>
             <a:srgbClr val="A4A3A4"/>
           </p15:clr>
         </p15:guide>
-        <p15:guide id="41" orient="horz" pos="38">
+        <p15:guide id="41" orient="horz" pos="38" userDrawn="1">
           <p15:clr>
             <a:srgbClr val="A4A3A4"/>
           </p15:clr>
         </p15:guide>
-        <p15:guide id="42" orient="horz" pos="4319">
+        <p15:guide id="42" orient="horz" pos="4319" userDrawn="1">
           <p15:clr>
             <a:srgbClr val="A4A3A4"/>
           </p15:clr>
         </p15:guide>
-        <p15:guide id="43" orient="horz" pos="39">
+        <p15:guide id="43" orient="horz" pos="39" userDrawn="1">
           <p15:clr>
             <a:srgbClr val="A4A3A4"/>
           </p15:clr>
         </p15:guide>
-        <p15:guide id="44" pos="3367">
+        <p15:guide id="44" pos="4489" userDrawn="1">
           <p15:clr>
             <a:srgbClr val="A4A3A4"/>
           </p15:clr>
         </p15:guide>
-        <p15:guide id="45" pos="4655">
+        <p15:guide id="45" pos="6207" userDrawn="1">
           <p15:clr>
             <a:srgbClr val="A4A3A4"/>
           </p15:clr>
         </p15:guide>
-        <p15:guide id="46" orient="horz" pos="1">
+        <p15:guide id="46" orient="horz" pos="1" userDrawn="1">
           <p15:clr>
             <a:srgbClr val="A4A3A4"/>
           </p15:clr>
         </p15:guide>
-        <p15:guide id="47" orient="horz" pos="4067">
+        <p15:guide id="47" orient="horz" pos="4067" userDrawn="1">
           <p15:clr>
             <a:srgbClr val="A4A3A4"/>
           </p15:clr>
         </p15:guide>
-        <p15:guide id="48" orient="horz" pos="601">
+        <p15:guide id="48" orient="horz" pos="601" userDrawn="1">
           <p15:clr>
             <a:srgbClr val="A4A3A4"/>
           </p15:clr>
         </p15:guide>
-        <p15:guide id="49" pos="149">
+        <p15:guide id="49" pos="199" userDrawn="1">
           <p15:clr>
             <a:srgbClr val="A4A3A4"/>
           </p15:clr>
         </p15:guide>
-        <p15:guide id="50" pos="5589">
+        <p15:guide id="50" pos="7452" userDrawn="1">
           <p15:clr>
             <a:srgbClr val="A4A3A4"/>
           </p15:clr>
         </p15:guide>
-        <p15:guide id="51" pos="3227">
+        <p15:guide id="51" pos="4303" userDrawn="1">
           <p15:clr>
             <a:srgbClr val="A4A3A4"/>
           </p15:clr>
@@ -6999,8 +6999,8 @@
         </p:nvSpPr>
         <p:spPr bwMode="auto">
           <a:xfrm>
-            <a:off x="993775" y="768350"/>
-            <a:ext cx="5116513" cy="3836988"/>
+            <a:off x="142875" y="768350"/>
+            <a:ext cx="6818313" cy="3836988"/>
           </a:xfrm>
           <a:prstGeom prst="rect">
             <a:avLst/>
@@ -7371,7 +7371,12 @@
             <p:ph type="sldImg"/>
           </p:nvPr>
         </p:nvSpPr>
-        <p:spPr/>
+        <p:spPr>
+          <a:xfrm>
+            <a:off x="142875" y="768350"/>
+            <a:ext cx="6818313" cy="3836988"/>
+          </a:xfrm>
+        </p:spPr>
       </p:sp>
       <p:sp>
         <p:nvSpPr>
@@ -7441,7 +7446,7 @@
         <p:spPr bwMode="auto">
           <a:xfrm>
             <a:off x="0" y="2276475"/>
-            <a:ext cx="9144000" cy="2665413"/>
+            <a:ext cx="12192000" cy="369332"/>
           </a:xfrm>
           <a:prstGeom prst="rect">
             <a:avLst/>
@@ -7568,7 +7573,7 @@
             <a:pPr>
               <a:defRPr/>
             </a:pPr>
-            <a:endParaRPr kumimoji="0" lang="zh-CN" altLang="en-US">
+            <a:endParaRPr kumimoji="0" lang="zh-CN" altLang="en-US" sz="2400">
               <a:solidFill>
                 <a:prstClr val="white"/>
               </a:solidFill>
@@ -7588,7 +7593,7 @@
         <p:spPr bwMode="auto">
           <a:xfrm>
             <a:off x="0" y="2203450"/>
-            <a:ext cx="9144000" cy="71438"/>
+            <a:ext cx="12192000" cy="369332"/>
           </a:xfrm>
           <a:prstGeom prst="rect">
             <a:avLst/>
@@ -7715,7 +7720,7 @@
             <a:pPr>
               <a:defRPr/>
             </a:pPr>
-            <a:endParaRPr kumimoji="0" lang="zh-CN" altLang="en-US">
+            <a:endParaRPr kumimoji="0" lang="zh-CN" altLang="en-US" sz="2400">
               <a:solidFill>
                 <a:prstClr val="white"/>
               </a:solidFill>
@@ -7735,7 +7740,7 @@
         <p:spPr bwMode="auto">
           <a:xfrm>
             <a:off x="0" y="4870450"/>
-            <a:ext cx="9144000" cy="71438"/>
+            <a:ext cx="12192000" cy="369332"/>
           </a:xfrm>
           <a:prstGeom prst="rect">
             <a:avLst/>
@@ -7862,7 +7867,7 @@
             <a:pPr>
               <a:defRPr/>
             </a:pPr>
-            <a:endParaRPr kumimoji="0" lang="zh-CN" altLang="en-US">
+            <a:endParaRPr kumimoji="0" lang="zh-CN" altLang="en-US" sz="2400">
               <a:solidFill>
                 <a:prstClr val="white"/>
               </a:solidFill>
@@ -7883,8 +7888,8 @@
         </p:nvSpPr>
         <p:spPr>
           <a:xfrm>
-            <a:off x="1828800" y="1828800"/>
-            <a:ext cx="6934200" cy="2362200"/>
+            <a:off x="2438400" y="1828800"/>
+            <a:ext cx="9245600" cy="2362200"/>
           </a:xfrm>
           <a:noFill/>
         </p:spPr>
@@ -7915,8 +7920,8 @@
         </p:nvSpPr>
         <p:spPr>
           <a:xfrm>
-            <a:off x="1828800" y="4572000"/>
-            <a:ext cx="6934200" cy="1295400"/>
+            <a:off x="2438400" y="4572000"/>
+            <a:ext cx="9245600" cy="1295400"/>
           </a:xfrm>
           <a:prstGeom prst="rect">
             <a:avLst/>
@@ -8029,8 +8034,8 @@
         </p:nvSpPr>
         <p:spPr>
           <a:xfrm>
-            <a:off x="287338" y="981075"/>
-            <a:ext cx="7772400" cy="5184775"/>
+            <a:off x="383117" y="981076"/>
+            <a:ext cx="10363200" cy="5184775"/>
           </a:xfrm>
           <a:prstGeom prst="rect">
             <a:avLst/>
@@ -8144,8 +8149,8 @@
         </p:nvSpPr>
         <p:spPr>
           <a:xfrm>
-            <a:off x="6858000" y="-26988"/>
-            <a:ext cx="2286000" cy="6192838"/>
+            <a:off x="9144000" y="-26988"/>
+            <a:ext cx="3048000" cy="6192838"/>
           </a:xfrm>
         </p:spPr>
         <p:txBody>
@@ -8172,7 +8177,7 @@
         <p:spPr>
           <a:xfrm>
             <a:off x="0" y="-26988"/>
-            <a:ext cx="6705600" cy="6192838"/>
+            <a:ext cx="8940800" cy="6192838"/>
           </a:xfrm>
           <a:prstGeom prst="rect">
             <a:avLst/>
@@ -8287,7 +8292,7 @@
         <p:spPr>
           <a:xfrm>
             <a:off x="0" y="-26988"/>
-            <a:ext cx="9144000" cy="6192838"/>
+            <a:ext cx="12192000" cy="6192838"/>
           </a:xfrm>
           <a:prstGeom prst="rect">
             <a:avLst/>
@@ -8402,7 +8407,7 @@
         <p:spPr>
           <a:xfrm>
             <a:off x="0" y="-26988"/>
-            <a:ext cx="9144000" cy="792163"/>
+            <a:ext cx="12192000" cy="792163"/>
           </a:xfrm>
         </p:spPr>
         <p:txBody>
@@ -8428,8 +8433,8 @@
         </p:nvSpPr>
         <p:spPr>
           <a:xfrm>
-            <a:off x="685800" y="981075"/>
-            <a:ext cx="7772400" cy="5184775"/>
+            <a:off x="914400" y="981076"/>
+            <a:ext cx="10363200" cy="5184775"/>
           </a:xfrm>
           <a:prstGeom prst="rect">
             <a:avLst/>
@@ -8513,7 +8518,7 @@
         <p:spPr>
           <a:xfrm>
             <a:off x="0" y="-26988"/>
-            <a:ext cx="9144000" cy="792163"/>
+            <a:ext cx="12192000" cy="792163"/>
           </a:xfrm>
         </p:spPr>
         <p:txBody>
@@ -8539,8 +8544,8 @@
         </p:nvSpPr>
         <p:spPr>
           <a:xfrm>
-            <a:off x="685800" y="981075"/>
-            <a:ext cx="3810000" cy="5184775"/>
+            <a:off x="914400" y="981076"/>
+            <a:ext cx="5080000" cy="5184775"/>
           </a:xfrm>
           <a:prstGeom prst="rect">
             <a:avLst/>
@@ -8598,8 +8603,8 @@
         </p:nvSpPr>
         <p:spPr>
           <a:xfrm>
-            <a:off x="4648200" y="981075"/>
-            <a:ext cx="3810000" cy="5184775"/>
+            <a:off x="6197600" y="981076"/>
+            <a:ext cx="5080000" cy="5184775"/>
           </a:xfrm>
           <a:prstGeom prst="rect">
             <a:avLst/>
@@ -8719,7 +8724,7 @@
         <p:spPr bwMode="auto">
           <a:xfrm>
             <a:off x="0" y="-1"/>
-            <a:ext cx="9144000" cy="6858001"/>
+            <a:ext cx="12192000" cy="6858001"/>
           </a:xfrm>
           <a:prstGeom prst="rect">
             <a:avLst/>
@@ -8740,7 +8745,7 @@
         <p:spPr>
           <a:xfrm>
             <a:off x="0" y="0"/>
-            <a:ext cx="9144000" cy="1071546"/>
+            <a:ext cx="12192000" cy="1071546"/>
           </a:xfrm>
           <a:prstGeom prst="rect">
             <a:avLst/>
@@ -8846,8 +8851,8 @@
         </p:nvSpPr>
         <p:spPr>
           <a:xfrm>
-            <a:off x="457200" y="6356350"/>
-            <a:ext cx="2133600" cy="365125"/>
+            <a:off x="609600" y="6356351"/>
+            <a:ext cx="2844800" cy="365125"/>
           </a:xfrm>
           <a:prstGeom prst="rect">
             <a:avLst/>
@@ -8879,8 +8884,8 @@
         </p:nvSpPr>
         <p:spPr>
           <a:xfrm>
-            <a:off x="3124200" y="6356350"/>
-            <a:ext cx="2895600" cy="365125"/>
+            <a:off x="4165600" y="6356351"/>
+            <a:ext cx="3860800" cy="365125"/>
           </a:xfrm>
           <a:prstGeom prst="rect">
             <a:avLst/>
@@ -8945,8 +8950,8 @@
         </p:nvSpPr>
         <p:spPr>
           <a:xfrm>
-            <a:off x="457200" y="6356350"/>
-            <a:ext cx="2133600" cy="365125"/>
+            <a:off x="609600" y="6356351"/>
+            <a:ext cx="2844800" cy="365125"/>
           </a:xfrm>
           <a:prstGeom prst="rect">
             <a:avLst/>
@@ -8978,8 +8983,8 @@
         </p:nvSpPr>
         <p:spPr>
           <a:xfrm>
-            <a:off x="3124200" y="6356350"/>
-            <a:ext cx="2895600" cy="365125"/>
+            <a:off x="4165600" y="6356351"/>
+            <a:ext cx="3860800" cy="365125"/>
           </a:xfrm>
           <a:prstGeom prst="rect">
             <a:avLst/>
@@ -9044,8 +9049,8 @@
         </p:nvSpPr>
         <p:spPr>
           <a:xfrm>
-            <a:off x="6982264" y="6467404"/>
-            <a:ext cx="2133600" cy="365125"/>
+            <a:off x="9309685" y="6467405"/>
+            <a:ext cx="2844800" cy="365125"/>
           </a:xfrm>
           <a:prstGeom prst="rect">
             <a:avLst/>
@@ -9101,7 +9106,7 @@
         <p:spPr>
           <a:xfrm>
             <a:off x="0" y="6395396"/>
-            <a:ext cx="9144000" cy="0"/>
+            <a:ext cx="12192000" cy="0"/>
           </a:xfrm>
           <a:custGeom>
             <a:avLst/>
@@ -9170,7 +9175,7 @@
                 <a:spcPts val="0"/>
               </a:spcAft>
             </a:pPr>
-            <a:endParaRPr lang="zh-CN" altLang="en-US">
+            <a:endParaRPr lang="zh-CN" altLang="en-US" sz="2400">
               <a:solidFill>
                 <a:prstClr val="white"/>
               </a:solidFill>
@@ -9190,8 +9195,8 @@
         </p:nvSpPr>
         <p:spPr bwMode="auto">
           <a:xfrm>
-            <a:off x="0" y="8526"/>
-            <a:ext cx="8024813" cy="792162"/>
+            <a:off x="1" y="8526"/>
+            <a:ext cx="10699751" cy="792162"/>
           </a:xfrm>
           <a:prstGeom prst="rect">
             <a:avLst/>
@@ -9284,8 +9289,8 @@
         </p:nvSpPr>
         <p:spPr>
           <a:xfrm>
-            <a:off x="685800" y="2130425"/>
-            <a:ext cx="7772400" cy="1470025"/>
+            <a:off x="914400" y="2130426"/>
+            <a:ext cx="10363200" cy="1470025"/>
           </a:xfrm>
         </p:spPr>
         <p:txBody>
@@ -9311,8 +9316,8 @@
         </p:nvSpPr>
         <p:spPr>
           <a:xfrm>
-            <a:off x="1371600" y="3886200"/>
-            <a:ext cx="6400800" cy="1752600"/>
+            <a:off x="1828800" y="3886200"/>
+            <a:ext cx="8534400" cy="609398"/>
           </a:xfrm>
         </p:spPr>
         <p:txBody>
@@ -9443,8 +9448,8 @@
         </p:nvSpPr>
         <p:spPr>
           <a:xfrm>
-            <a:off x="287338" y="981075"/>
-            <a:ext cx="7772400" cy="5184775"/>
+            <a:off x="383117" y="981076"/>
+            <a:ext cx="10363200" cy="5184775"/>
           </a:xfrm>
           <a:prstGeom prst="rect">
             <a:avLst/>
@@ -9730,8 +9735,8 @@
         </p:nvSpPr>
         <p:spPr>
           <a:xfrm>
-            <a:off x="722313" y="4406900"/>
-            <a:ext cx="7772400" cy="1362075"/>
+            <a:off x="963084" y="4406901"/>
+            <a:ext cx="10363200" cy="1362075"/>
           </a:xfrm>
         </p:spPr>
         <p:txBody>
@@ -9761,8 +9766,8 @@
         </p:nvSpPr>
         <p:spPr>
           <a:xfrm>
-            <a:off x="722313" y="2906713"/>
-            <a:ext cx="7772400" cy="1500187"/>
+            <a:off x="963084" y="3945235"/>
+            <a:ext cx="10363200" cy="461665"/>
           </a:xfrm>
         </p:spPr>
         <p:txBody>
@@ -9916,8 +9921,8 @@
         </p:nvSpPr>
         <p:spPr>
           <a:xfrm>
-            <a:off x="325438" y="1087438"/>
-            <a:ext cx="4027487" cy="2270125"/>
+            <a:off x="433918" y="1087439"/>
+            <a:ext cx="5369983" cy="2332946"/>
           </a:xfrm>
         </p:spPr>
         <p:txBody>
@@ -10000,8 +10005,8 @@
         </p:nvSpPr>
         <p:spPr>
           <a:xfrm>
-            <a:off x="4505325" y="1087438"/>
-            <a:ext cx="4027488" cy="2270125"/>
+            <a:off x="6007100" y="1087439"/>
+            <a:ext cx="5369984" cy="2332946"/>
           </a:xfrm>
         </p:spPr>
         <p:txBody>
@@ -10152,8 +10157,8 @@
         </p:nvSpPr>
         <p:spPr>
           <a:xfrm>
-            <a:off x="457200" y="274638"/>
-            <a:ext cx="8229600" cy="1143000"/>
+            <a:off x="609600" y="274638"/>
+            <a:ext cx="10972800" cy="1143000"/>
           </a:xfrm>
         </p:spPr>
         <p:txBody>
@@ -10183,8 +10188,8 @@
         </p:nvSpPr>
         <p:spPr>
           <a:xfrm>
-            <a:off x="457200" y="1535113"/>
-            <a:ext cx="4040188" cy="639762"/>
+            <a:off x="609600" y="1639344"/>
+            <a:ext cx="5386917" cy="535531"/>
           </a:xfrm>
         </p:spPr>
         <p:txBody>
@@ -10248,8 +10253,8 @@
         </p:nvSpPr>
         <p:spPr>
           <a:xfrm>
-            <a:off x="457200" y="2174875"/>
-            <a:ext cx="4040188" cy="3951288"/>
+            <a:off x="609600" y="2174875"/>
+            <a:ext cx="5386917" cy="2043636"/>
           </a:xfrm>
         </p:spPr>
         <p:txBody>
@@ -10332,8 +10337,8 @@
         </p:nvSpPr>
         <p:spPr>
           <a:xfrm>
-            <a:off x="4645025" y="1535113"/>
-            <a:ext cx="4041775" cy="639762"/>
+            <a:off x="6193368" y="1639344"/>
+            <a:ext cx="5389033" cy="535531"/>
           </a:xfrm>
         </p:spPr>
         <p:txBody>
@@ -10397,8 +10402,8 @@
         </p:nvSpPr>
         <p:spPr>
           <a:xfrm>
-            <a:off x="4645025" y="2174875"/>
-            <a:ext cx="4041775" cy="3951288"/>
+            <a:off x="6193368" y="2174875"/>
+            <a:ext cx="5389033" cy="2043636"/>
           </a:xfrm>
         </p:spPr>
         <p:txBody>
@@ -10707,8 +10712,8 @@
         </p:nvSpPr>
         <p:spPr>
           <a:xfrm>
-            <a:off x="457200" y="273050"/>
-            <a:ext cx="3008313" cy="1162050"/>
+            <a:off x="609601" y="273050"/>
+            <a:ext cx="4011084" cy="1162050"/>
           </a:xfrm>
         </p:spPr>
         <p:txBody>
@@ -10738,8 +10743,8 @@
         </p:nvSpPr>
         <p:spPr>
           <a:xfrm>
-            <a:off x="3575050" y="273050"/>
-            <a:ext cx="5111750" cy="5853113"/>
+            <a:off x="4766733" y="273051"/>
+            <a:ext cx="6815667" cy="2665345"/>
           </a:xfrm>
         </p:spPr>
         <p:txBody>
@@ -10822,8 +10827,8 @@
         </p:nvSpPr>
         <p:spPr>
           <a:xfrm>
-            <a:off x="457200" y="1435100"/>
-            <a:ext cx="3008313" cy="4691063"/>
+            <a:off x="609601" y="1435101"/>
+            <a:ext cx="4011084" cy="350865"/>
           </a:xfrm>
         </p:spPr>
         <p:txBody>
@@ -10955,8 +10960,8 @@
         </p:nvSpPr>
         <p:spPr>
           <a:xfrm>
-            <a:off x="1792288" y="4800600"/>
-            <a:ext cx="5486400" cy="566738"/>
+            <a:off x="2389717" y="4800600"/>
+            <a:ext cx="7315200" cy="566738"/>
           </a:xfrm>
         </p:spPr>
         <p:txBody>
@@ -10986,8 +10991,8 @@
         </p:nvSpPr>
         <p:spPr>
           <a:xfrm>
-            <a:off x="1792288" y="612775"/>
-            <a:ext cx="5486400" cy="4114800"/>
+            <a:off x="2389717" y="612775"/>
+            <a:ext cx="7315200" cy="683264"/>
           </a:xfrm>
         </p:spPr>
         <p:txBody>
@@ -11048,8 +11053,8 @@
         </p:nvSpPr>
         <p:spPr>
           <a:xfrm>
-            <a:off x="1792288" y="5367338"/>
-            <a:ext cx="5486400" cy="804862"/>
+            <a:off x="2389717" y="5367338"/>
+            <a:ext cx="7315200" cy="350865"/>
           </a:xfrm>
         </p:spPr>
         <p:txBody>
@@ -11201,7 +11206,12 @@
             <p:ph type="body" orient="vert" idx="1"/>
           </p:nvPr>
         </p:nvSpPr>
-        <p:spPr/>
+        <p:spPr>
+          <a:xfrm>
+            <a:off x="7917676" y="1087439"/>
+            <a:ext cx="3459409" cy="2332946"/>
+          </a:xfrm>
+        </p:spPr>
         <p:txBody>
           <a:bodyPr vert="eaVert"/>
           <a:lstStyle/>
@@ -11322,8 +11332,8 @@
         </p:nvSpPr>
         <p:spPr>
           <a:xfrm>
-            <a:off x="6507163" y="115888"/>
-            <a:ext cx="2168525" cy="3241675"/>
+            <a:off x="8676218" y="115889"/>
+            <a:ext cx="2891367" cy="3241675"/>
           </a:xfrm>
         </p:spPr>
         <p:txBody>
@@ -11349,8 +11359,8 @@
         </p:nvSpPr>
         <p:spPr>
           <a:xfrm>
-            <a:off x="0" y="115888"/>
-            <a:ext cx="6354763" cy="3241675"/>
+            <a:off x="5530674" y="115889"/>
+            <a:ext cx="2942344" cy="3241675"/>
           </a:xfrm>
         </p:spPr>
         <p:txBody>
@@ -11473,8 +11483,8 @@
         </p:nvSpPr>
         <p:spPr>
           <a:xfrm>
-            <a:off x="722313" y="4406900"/>
-            <a:ext cx="7772400" cy="1362075"/>
+            <a:off x="963084" y="4406901"/>
+            <a:ext cx="10363200" cy="1362075"/>
           </a:xfrm>
         </p:spPr>
         <p:txBody>
@@ -11504,8 +11514,8 @@
         </p:nvSpPr>
         <p:spPr>
           <a:xfrm>
-            <a:off x="722313" y="2906713"/>
-            <a:ext cx="7772400" cy="1500187"/>
+            <a:off x="963084" y="2906713"/>
+            <a:ext cx="10363200" cy="1500187"/>
           </a:xfrm>
           <a:prstGeom prst="rect">
             <a:avLst/>
@@ -11628,8 +11638,8 @@
         </p:nvSpPr>
         <p:spPr>
           <a:xfrm>
-            <a:off x="685800" y="981075"/>
-            <a:ext cx="3810000" cy="5184775"/>
+            <a:off x="914400" y="981076"/>
+            <a:ext cx="5080000" cy="5184775"/>
           </a:xfrm>
           <a:prstGeom prst="rect">
             <a:avLst/>
@@ -11715,8 +11725,8 @@
         </p:nvSpPr>
         <p:spPr>
           <a:xfrm>
-            <a:off x="4648200" y="981075"/>
-            <a:ext cx="3810000" cy="5184775"/>
+            <a:off x="6197600" y="981076"/>
+            <a:ext cx="5080000" cy="5184775"/>
           </a:xfrm>
           <a:prstGeom prst="rect">
             <a:avLst/>
@@ -11880,8 +11890,8 @@
         </p:nvSpPr>
         <p:spPr>
           <a:xfrm>
-            <a:off x="457200" y="274638"/>
-            <a:ext cx="8229600" cy="1143000"/>
+            <a:off x="609600" y="274638"/>
+            <a:ext cx="10972800" cy="1143000"/>
           </a:xfrm>
         </p:spPr>
         <p:txBody>
@@ -11911,8 +11921,8 @@
         </p:nvSpPr>
         <p:spPr>
           <a:xfrm>
-            <a:off x="457200" y="1535113"/>
-            <a:ext cx="4040188" cy="639762"/>
+            <a:off x="609600" y="1535113"/>
+            <a:ext cx="5386917" cy="639762"/>
           </a:xfrm>
           <a:prstGeom prst="rect">
             <a:avLst/>
@@ -11979,8 +11989,8 @@
         </p:nvSpPr>
         <p:spPr>
           <a:xfrm>
-            <a:off x="457200" y="2174875"/>
-            <a:ext cx="4040188" cy="3951288"/>
+            <a:off x="609600" y="2174875"/>
+            <a:ext cx="5386917" cy="3951288"/>
           </a:xfrm>
           <a:prstGeom prst="rect">
             <a:avLst/>
@@ -12066,8 +12076,8 @@
         </p:nvSpPr>
         <p:spPr>
           <a:xfrm>
-            <a:off x="4645025" y="1535113"/>
-            <a:ext cx="4041775" cy="639762"/>
+            <a:off x="6193368" y="1535113"/>
+            <a:ext cx="5389033" cy="639762"/>
           </a:xfrm>
           <a:prstGeom prst="rect">
             <a:avLst/>
@@ -12134,8 +12144,8 @@
         </p:nvSpPr>
         <p:spPr>
           <a:xfrm>
-            <a:off x="4645025" y="2174875"/>
-            <a:ext cx="4041775" cy="3951288"/>
+            <a:off x="6193368" y="2174875"/>
+            <a:ext cx="5389033" cy="3951288"/>
           </a:xfrm>
           <a:prstGeom prst="rect">
             <a:avLst/>
@@ -12411,8 +12421,8 @@
         </p:nvSpPr>
         <p:spPr>
           <a:xfrm>
-            <a:off x="457200" y="273050"/>
-            <a:ext cx="3008313" cy="1162050"/>
+            <a:off x="609601" y="273050"/>
+            <a:ext cx="4011084" cy="1162050"/>
           </a:xfrm>
         </p:spPr>
         <p:txBody>
@@ -12442,8 +12452,8 @@
         </p:nvSpPr>
         <p:spPr>
           <a:xfrm>
-            <a:off x="3575050" y="273050"/>
-            <a:ext cx="5111750" cy="5853113"/>
+            <a:off x="4766733" y="273051"/>
+            <a:ext cx="6815667" cy="5853113"/>
           </a:xfrm>
           <a:prstGeom prst="rect">
             <a:avLst/>
@@ -12529,8 +12539,8 @@
         </p:nvSpPr>
         <p:spPr>
           <a:xfrm>
-            <a:off x="457200" y="1435100"/>
-            <a:ext cx="3008313" cy="4691063"/>
+            <a:off x="609601" y="1435101"/>
+            <a:ext cx="4011084" cy="4691063"/>
           </a:xfrm>
           <a:prstGeom prst="rect">
             <a:avLst/>
@@ -12653,8 +12663,8 @@
         </p:nvSpPr>
         <p:spPr>
           <a:xfrm>
-            <a:off x="1792288" y="4800600"/>
-            <a:ext cx="5486400" cy="566738"/>
+            <a:off x="2389717" y="4800600"/>
+            <a:ext cx="7315200" cy="566738"/>
           </a:xfrm>
         </p:spPr>
         <p:txBody>
@@ -12684,8 +12694,8 @@
         </p:nvSpPr>
         <p:spPr>
           <a:xfrm>
-            <a:off x="1792288" y="612775"/>
-            <a:ext cx="5486400" cy="4114800"/>
+            <a:off x="2389717" y="612775"/>
+            <a:ext cx="7315200" cy="4114800"/>
           </a:xfrm>
           <a:prstGeom prst="rect">
             <a:avLst/>
@@ -12749,8 +12759,8 @@
         </p:nvSpPr>
         <p:spPr>
           <a:xfrm>
-            <a:off x="1792288" y="5367338"/>
-            <a:ext cx="5486400" cy="804862"/>
+            <a:off x="2389717" y="5367338"/>
+            <a:ext cx="7315200" cy="804862"/>
           </a:xfrm>
           <a:prstGeom prst="rect">
             <a:avLst/>
@@ -12881,8 +12891,8 @@
         </p:nvSpPr>
         <p:spPr bwMode="auto">
           <a:xfrm>
-            <a:off x="182850" y="8526"/>
-            <a:ext cx="8024813" cy="792162"/>
+            <a:off x="243801" y="8526"/>
+            <a:ext cx="10699751" cy="792162"/>
           </a:xfrm>
           <a:prstGeom prst="rect">
             <a:avLst/>
@@ -12938,8 +12948,8 @@
         </p:nvSpPr>
         <p:spPr>
           <a:xfrm rot="5400000">
-            <a:off x="4513516" y="-3740963"/>
-            <a:ext cx="72000" cy="9099032"/>
+            <a:off x="6030021" y="-5257469"/>
+            <a:ext cx="72000" cy="12132043"/>
           </a:xfrm>
           <a:prstGeom prst="round2SameRect">
             <a:avLst>
@@ -12998,8 +13008,8 @@
         </p:nvSpPr>
         <p:spPr>
           <a:xfrm rot="5400000" flipH="1">
-            <a:off x="8530149" y="230704"/>
-            <a:ext cx="72000" cy="1155701"/>
+            <a:off x="11385532" y="38088"/>
+            <a:ext cx="72000" cy="1540935"/>
           </a:xfrm>
           <a:prstGeom prst="round2SameRect">
             <a:avLst>
@@ -13065,8 +13075,8 @@
         </p:nvSpPr>
         <p:spPr>
           <a:xfrm>
-            <a:off x="6553200" y="6356350"/>
-            <a:ext cx="2133600" cy="365125"/>
+            <a:off x="8737600" y="6356351"/>
+            <a:ext cx="2844800" cy="365125"/>
           </a:xfrm>
           <a:prstGeom prst="rect">
             <a:avLst/>
@@ -13578,8 +13588,8 @@
         </p:blipFill>
         <p:spPr bwMode="auto">
           <a:xfrm>
-            <a:off x="0" y="0"/>
-            <a:ext cx="9142413" cy="6856413"/>
+            <a:off x="1" y="1"/>
+            <a:ext cx="12189884" cy="6856413"/>
           </a:xfrm>
           <a:prstGeom prst="rect">
             <a:avLst/>
@@ -13605,8 +13615,8 @@
         </p:nvSpPr>
         <p:spPr bwMode="auto">
           <a:xfrm>
-            <a:off x="0" y="115888"/>
-            <a:ext cx="8675688" cy="649287"/>
+            <a:off x="0" y="115889"/>
+            <a:ext cx="11567584" cy="649287"/>
           </a:xfrm>
           <a:prstGeom prst="rect">
             <a:avLst/>
@@ -13653,8 +13663,8 @@
         </p:nvSpPr>
         <p:spPr bwMode="auto">
           <a:xfrm>
-            <a:off x="325438" y="1087438"/>
-            <a:ext cx="8207375" cy="2270125"/>
+            <a:off x="433918" y="1087439"/>
+            <a:ext cx="10943167" cy="2332946"/>
           </a:xfrm>
           <a:prstGeom prst="rect">
             <a:avLst/>
@@ -13779,8 +13789,8 @@
         </p:nvSpPr>
         <p:spPr bwMode="auto">
           <a:xfrm>
-            <a:off x="6902450" y="6499225"/>
-            <a:ext cx="2133600" cy="212725"/>
+            <a:off x="9203267" y="6499226"/>
+            <a:ext cx="2844800" cy="212725"/>
           </a:xfrm>
           <a:prstGeom prst="rect">
             <a:avLst/>
@@ -14333,8 +14343,8 @@
         </p:nvSpPr>
         <p:spPr>
           <a:xfrm>
-            <a:off x="0" y="8526"/>
-            <a:ext cx="9013371" cy="792162"/>
+            <a:off x="266701" y="8526"/>
+            <a:ext cx="10270672" cy="792162"/>
           </a:xfrm>
         </p:spPr>
         <p:txBody>
@@ -14342,7 +14352,7 @@
           <a:lstStyle/>
           <a:p>
             <a:r>
-              <a:rPr lang="zh-CN" altLang="en-US" sz="3600" b="1" dirty="0">
+              <a:rPr lang="zh-CN" altLang="en-US" dirty="0">
                 <a:latin typeface="微软雅黑" pitchFamily="34" charset="-122"/>
                 <a:ea typeface="微软雅黑" pitchFamily="34" charset="-122"/>
               </a:rPr>
@@ -14366,8 +14376,8 @@
         </p:nvSpPr>
         <p:spPr>
           <a:xfrm>
-            <a:off x="414554" y="821906"/>
-            <a:ext cx="8314891" cy="743986"/>
+            <a:off x="688063" y="837690"/>
+            <a:ext cx="9427947" cy="743986"/>
           </a:xfrm>
           <a:prstGeom prst="rect">
             <a:avLst/>
@@ -14419,8 +14429,8 @@
         </p:nvSpPr>
         <p:spPr>
           <a:xfrm>
-            <a:off x="414552" y="2115971"/>
-            <a:ext cx="8445430" cy="4370427"/>
+            <a:off x="844550" y="2115972"/>
+            <a:ext cx="10750550" cy="4539704"/>
           </a:xfrm>
           <a:prstGeom prst="rect">
             <a:avLst/>
@@ -14445,7 +14455,7 @@
               <a:t>作业数据</a:t>
             </a:r>
             <a:r>
-              <a:rPr lang="zh-CN" altLang="en-US" sz="2200" b="1" dirty="0">
+              <a:rPr lang="zh-CN" altLang="en-US" sz="2000" b="1" dirty="0">
                 <a:solidFill>
                   <a:srgbClr val="333333"/>
                 </a:solidFill>
@@ -14462,7 +14472,7 @@
                 <a:latin typeface="+mn-ea"/>
                 <a:ea typeface="+mn-ea"/>
               </a:rPr>
-              <a:t>昆明市呈贡区公开矢量数据（如边界、路网、水域等）</a:t>
+              <a:t>昆明市呈贡区公开矢量数据（如边界、路网、水域、学校等）</a:t>
             </a:r>
             <a:endParaRPr lang="en-US" altLang="zh-CN" sz="2000" dirty="0">
               <a:solidFill>
@@ -14495,7 +14505,7 @@
           <a:p>
             <a:pPr algn="just"/>
             <a:r>
-              <a:rPr lang="zh-CN" altLang="en-US" sz="2000" dirty="0">
+              <a:rPr lang="zh-CN" altLang="en-US" sz="2200" dirty="0">
                 <a:solidFill>
                   <a:srgbClr val="333333"/>
                 </a:solidFill>
@@ -14505,7 +14515,7 @@
               <a:t>（</a:t>
             </a:r>
             <a:r>
-              <a:rPr lang="en-US" altLang="zh-CN" sz="2000" dirty="0">
+              <a:rPr lang="en-US" altLang="zh-CN" sz="2200" dirty="0">
                 <a:solidFill>
                   <a:srgbClr val="333333"/>
                 </a:solidFill>
@@ -14515,7 +14525,7 @@
               <a:t>1</a:t>
             </a:r>
             <a:r>
-              <a:rPr lang="zh-CN" altLang="en-US" sz="2000" dirty="0">
+              <a:rPr lang="zh-CN" altLang="en-US" sz="2200" dirty="0">
                 <a:solidFill>
                   <a:srgbClr val="333333"/>
                 </a:solidFill>
@@ -14524,7 +14534,7 @@
               </a:rPr>
               <a:t>）昆明市呈贡区点、线、面等几何要素收集。</a:t>
             </a:r>
-            <a:endParaRPr lang="en-US" altLang="zh-CN" sz="2000" dirty="0">
+            <a:endParaRPr lang="en-US" altLang="zh-CN" sz="2200" dirty="0">
               <a:solidFill>
                 <a:srgbClr val="333333"/>
               </a:solidFill>
@@ -14535,7 +14545,7 @@
           <a:p>
             <a:pPr algn="just"/>
             <a:r>
-              <a:rPr lang="zh-CN" altLang="en-US" sz="2000" dirty="0">
+              <a:rPr lang="zh-CN" altLang="en-US" sz="2200" dirty="0">
                 <a:solidFill>
                   <a:srgbClr val="333333"/>
                 </a:solidFill>
@@ -14545,7 +14555,7 @@
               <a:t>（</a:t>
             </a:r>
             <a:r>
-              <a:rPr lang="en-US" altLang="zh-CN" sz="2000" dirty="0">
+              <a:rPr lang="en-US" altLang="zh-CN" sz="2200" dirty="0">
                 <a:solidFill>
                   <a:srgbClr val="333333"/>
                 </a:solidFill>
@@ -14555,7 +14565,7 @@
               <a:t>2</a:t>
             </a:r>
             <a:r>
-              <a:rPr lang="zh-CN" altLang="en-US" sz="2000" dirty="0">
+              <a:rPr lang="zh-CN" altLang="en-US" sz="2200" dirty="0">
                 <a:solidFill>
                   <a:srgbClr val="333333"/>
                 </a:solidFill>
@@ -14565,7 +14575,7 @@
               <a:t>）基于</a:t>
             </a:r>
             <a:r>
-              <a:rPr lang="en-US" altLang="zh-CN" sz="2000" dirty="0">
+              <a:rPr lang="en-US" altLang="zh-CN" sz="2200" dirty="0">
                 <a:solidFill>
                   <a:srgbClr val="333333"/>
                 </a:solidFill>
@@ -14575,17 +14585,17 @@
               <a:t>shapely</a:t>
             </a:r>
             <a:r>
-              <a:rPr lang="zh-CN" altLang="en-US" sz="2000" dirty="0">
+              <a:rPr lang="zh-CN" altLang="en-US" sz="2200" dirty="0">
                 <a:solidFill>
                   <a:srgbClr val="333333"/>
                 </a:solidFill>
                 <a:latin typeface="+mn-ea"/>
                 <a:ea typeface="+mn-ea"/>
               </a:rPr>
-              <a:t>的呈贡区几何要素分析（</a:t>
-            </a:r>
-            <a:r>
-              <a:rPr lang="zh-CN" altLang="en-US" sz="2000" i="1" dirty="0">
+              <a:t>的呈贡区地理要素分析（</a:t>
+            </a:r>
+            <a:r>
+              <a:rPr lang="zh-CN" altLang="en-US" sz="2200" i="1" dirty="0">
                 <a:solidFill>
                   <a:srgbClr val="333333"/>
                 </a:solidFill>
@@ -14595,7 +14605,7 @@
               <a:t>几何要素属性及相关关系</a:t>
             </a:r>
             <a:r>
-              <a:rPr lang="zh-CN" altLang="en-US" sz="2000" dirty="0">
+              <a:rPr lang="zh-CN" altLang="en-US" sz="2200" dirty="0">
                 <a:solidFill>
                   <a:srgbClr val="333333"/>
                 </a:solidFill>
@@ -14604,7 +14614,7 @@
               </a:rPr>
               <a:t>）。</a:t>
             </a:r>
-            <a:endParaRPr lang="en-US" altLang="zh-CN" sz="2000" dirty="0">
+            <a:endParaRPr lang="en-US" altLang="zh-CN" sz="2200" dirty="0">
               <a:solidFill>
                 <a:srgbClr val="333333"/>
               </a:solidFill>
@@ -14615,7 +14625,7 @@
           <a:p>
             <a:pPr algn="just"/>
             <a:r>
-              <a:rPr lang="zh-CN" altLang="en-US" sz="2000" dirty="0">
+              <a:rPr lang="zh-CN" altLang="en-US" sz="2200" dirty="0">
                 <a:solidFill>
                   <a:srgbClr val="333333"/>
                 </a:solidFill>
@@ -14625,7 +14635,7 @@
               <a:t>（</a:t>
             </a:r>
             <a:r>
-              <a:rPr lang="en-US" altLang="zh-CN" sz="2000" dirty="0">
+              <a:rPr lang="en-US" altLang="zh-CN" sz="2200" dirty="0">
                 <a:solidFill>
                   <a:srgbClr val="333333"/>
                 </a:solidFill>
@@ -14635,7 +14645,7 @@
               <a:t>3</a:t>
             </a:r>
             <a:r>
-              <a:rPr lang="zh-CN" altLang="en-US" sz="2000" dirty="0">
+              <a:rPr lang="zh-CN" altLang="en-US" sz="2200" dirty="0">
                 <a:solidFill>
                   <a:srgbClr val="333333"/>
                 </a:solidFill>
@@ -14644,7 +14654,7 @@
               </a:rPr>
               <a:t>）数据需标注来源，需对实验过程进行总结。</a:t>
             </a:r>
-            <a:endParaRPr lang="en-US" altLang="zh-CN" sz="2000" dirty="0">
+            <a:endParaRPr lang="en-US" altLang="zh-CN" sz="2200" dirty="0">
               <a:solidFill>
                 <a:srgbClr val="333333"/>
               </a:solidFill>
@@ -14665,7 +14675,7 @@
               <a:t>作业提交：</a:t>
             </a:r>
             <a:r>
-              <a:rPr lang="zh-CN" altLang="en-US" sz="2000" dirty="0">
+              <a:rPr lang="zh-CN" altLang="en-US" sz="2200" dirty="0">
                 <a:solidFill>
                   <a:srgbClr val="333333"/>
                 </a:solidFill>
@@ -14675,17 +14685,17 @@
               <a:t>实验文档，以</a:t>
             </a:r>
             <a:r>
-              <a:rPr lang="en-US" altLang="zh-CN" sz="2000" b="1" u="sng" dirty="0">
+              <a:rPr lang="en-US" altLang="zh-CN" sz="2200" b="1" u="sng" dirty="0">
                 <a:solidFill>
                   <a:srgbClr val="333333"/>
                 </a:solidFill>
                 <a:latin typeface="+mn-ea"/>
                 <a:ea typeface="+mn-ea"/>
               </a:rPr>
-              <a:t>markdown</a:t>
-            </a:r>
-            <a:r>
-              <a:rPr lang="zh-CN" altLang="en-US" sz="2000" b="1" u="sng" dirty="0">
+              <a:t>pdf</a:t>
+            </a:r>
+            <a:r>
+              <a:rPr lang="zh-CN" altLang="en-US" sz="2200" b="1" u="sng" dirty="0">
                 <a:solidFill>
                   <a:srgbClr val="333333"/>
                 </a:solidFill>
@@ -14695,7 +14705,7 @@
               <a:t>格式</a:t>
             </a:r>
             <a:r>
-              <a:rPr lang="zh-CN" altLang="en-US" sz="2000" dirty="0">
+              <a:rPr lang="zh-CN" altLang="en-US" sz="2200" dirty="0">
                 <a:solidFill>
                   <a:srgbClr val="333333"/>
                 </a:solidFill>
@@ -14705,7 +14715,7 @@
               <a:t>提交，要求格式规范、内容准确且</a:t>
             </a:r>
             <a:r>
-              <a:rPr lang="zh-CN" altLang="en-US" sz="2000" b="1" dirty="0">
+              <a:rPr lang="zh-CN" altLang="en-US" sz="2200" b="1" dirty="0">
                 <a:solidFill>
                   <a:srgbClr val="333333"/>
                 </a:solidFill>
@@ -14715,7 +14725,7 @@
               <a:t>实验细节充分</a:t>
             </a:r>
             <a:r>
-              <a:rPr lang="zh-CN" altLang="en-US" sz="2000" dirty="0">
+              <a:rPr lang="zh-CN" altLang="en-US" sz="2200" dirty="0">
                 <a:solidFill>
                   <a:srgbClr val="333333"/>
                 </a:solidFill>
@@ -14725,7 +14735,7 @@
               <a:t>。作业文件大小总结不超过</a:t>
             </a:r>
             <a:r>
-              <a:rPr lang="en-US" altLang="zh-CN" sz="2000" dirty="0">
+              <a:rPr lang="en-US" altLang="zh-CN" sz="2200" dirty="0">
                 <a:solidFill>
                   <a:srgbClr val="333333"/>
                 </a:solidFill>
@@ -14735,7 +14745,7 @@
               <a:t>1M</a:t>
             </a:r>
             <a:r>
-              <a:rPr lang="zh-CN" altLang="en-US" sz="2000" dirty="0">
+              <a:rPr lang="zh-CN" altLang="en-US" sz="2200" dirty="0">
                 <a:solidFill>
                   <a:srgbClr val="333333"/>
                 </a:solidFill>
@@ -14744,7 +14754,7 @@
               </a:rPr>
               <a:t>。</a:t>
             </a:r>
-            <a:endParaRPr lang="en-US" altLang="zh-CN" sz="2000" dirty="0">
+            <a:endParaRPr lang="en-US" altLang="zh-CN" sz="2200" dirty="0">
               <a:solidFill>
                 <a:srgbClr val="333333"/>
               </a:solidFill>
@@ -14822,7 +14832,7 @@
                 <a:latin typeface="+mn-ea"/>
                 <a:ea typeface="+mn-ea"/>
               </a:rPr>
-              <a:t>2025</a:t>
+              <a:t>2026</a:t>
             </a:r>
             <a:r>
               <a:rPr lang="zh-CN" altLang="en-US" sz="2000" b="1" u="sng" dirty="0">
@@ -14874,7 +14884,7 @@
               </a:rPr>
               <a:t>日</a:t>
             </a:r>
-            <a:endParaRPr lang="en-US" altLang="zh-CN" sz="2200" b="1" u="sng" dirty="0">
+            <a:endParaRPr lang="en-US" altLang="zh-CN" sz="2000" b="1" u="sng" dirty="0">
               <a:solidFill>
                 <a:srgbClr val="FF0000"/>
               </a:solidFill>
@@ -14898,8 +14908,8 @@
         </p:nvSpPr>
         <p:spPr>
           <a:xfrm>
-            <a:off x="414552" y="1542097"/>
-            <a:ext cx="8445430" cy="523220"/>
+            <a:off x="1193800" y="1567497"/>
+            <a:ext cx="9804400" cy="523220"/>
           </a:xfrm>
           <a:prstGeom prst="rect">
             <a:avLst/>
@@ -14920,7 +14930,7 @@
                 <a:latin typeface="+mn-ea"/>
                 <a:ea typeface="+mn-ea"/>
               </a:rPr>
-              <a:t>题目：昆明市呈贡区几何要素分析</a:t>
+              <a:t>题目：昆明市呈贡区地理要素分析</a:t>
             </a:r>
             <a:endParaRPr lang="en-US" altLang="zh-CN" sz="2800" b="1" u="sng" dirty="0">
               <a:solidFill>
